--- a/Наработки/диздоки/Испания/Испания левые.pptx
+++ b/Наработки/диздоки/Испания/Испания левые.pptx
@@ -109,7 +109,7 @@
   </p:defaultTextStyle>
   <p:extLst>
     <p:ext uri="{EFAFB233-063F-42B5-8137-9DF3F51BA10A}">
-      <p15:sldGuideLst xmlns="" xmlns:p15="http://schemas.microsoft.com/office/powerpoint/2012/main">
+      <p15:sldGuideLst xmlns:p15="http://schemas.microsoft.com/office/powerpoint/2012/main">
         <p15:guide id="1" orient="horz" pos="11344">
           <p15:clr>
             <a:srgbClr val="A4A3A4"/>
@@ -209,7 +209,7 @@
             <a:fld id="{33E3D7F9-E251-484C-A6FF-FA958879DF69}" type="datetimeFigureOut">
               <a:rPr lang="ru-RU" smtClean="0"/>
               <a:pPr/>
-              <a:t>21.12.2023</a:t>
+              <a:t>05.05.2026</a:t>
             </a:fld>
             <a:endParaRPr lang="ru-RU"/>
           </a:p>
@@ -699,7 +699,7 @@
             <a:fld id="{85A5DE44-605B-4D3B-B2B7-94543DF81A36}" type="datetimeFigureOut">
               <a:rPr lang="ru-RU" smtClean="0"/>
               <a:pPr/>
-              <a:t>21.12.2023</a:t>
+              <a:t>05.05.2026</a:t>
             </a:fld>
             <a:endParaRPr lang="ru-RU"/>
           </a:p>
@@ -871,7 +871,7 @@
             <a:fld id="{85A5DE44-605B-4D3B-B2B7-94543DF81A36}" type="datetimeFigureOut">
               <a:rPr lang="ru-RU" smtClean="0"/>
               <a:pPr/>
-              <a:t>21.12.2023</a:t>
+              <a:t>05.05.2026</a:t>
             </a:fld>
             <a:endParaRPr lang="ru-RU"/>
           </a:p>
@@ -1053,7 +1053,7 @@
             <a:fld id="{85A5DE44-605B-4D3B-B2B7-94543DF81A36}" type="datetimeFigureOut">
               <a:rPr lang="ru-RU" smtClean="0"/>
               <a:pPr/>
-              <a:t>21.12.2023</a:t>
+              <a:t>05.05.2026</a:t>
             </a:fld>
             <a:endParaRPr lang="ru-RU"/>
           </a:p>
@@ -1225,7 +1225,7 @@
             <a:fld id="{85A5DE44-605B-4D3B-B2B7-94543DF81A36}" type="datetimeFigureOut">
               <a:rPr lang="ru-RU" smtClean="0"/>
               <a:pPr/>
-              <a:t>21.12.2023</a:t>
+              <a:t>05.05.2026</a:t>
             </a:fld>
             <a:endParaRPr lang="ru-RU"/>
           </a:p>
@@ -1473,7 +1473,7 @@
             <a:fld id="{85A5DE44-605B-4D3B-B2B7-94543DF81A36}" type="datetimeFigureOut">
               <a:rPr lang="ru-RU" smtClean="0"/>
               <a:pPr/>
-              <a:t>21.12.2023</a:t>
+              <a:t>05.05.2026</a:t>
             </a:fld>
             <a:endParaRPr lang="ru-RU"/>
           </a:p>
@@ -1707,7 +1707,7 @@
             <a:fld id="{85A5DE44-605B-4D3B-B2B7-94543DF81A36}" type="datetimeFigureOut">
               <a:rPr lang="ru-RU" smtClean="0"/>
               <a:pPr/>
-              <a:t>21.12.2023</a:t>
+              <a:t>05.05.2026</a:t>
             </a:fld>
             <a:endParaRPr lang="ru-RU"/>
           </a:p>
@@ -2076,7 +2076,7 @@
             <a:fld id="{85A5DE44-605B-4D3B-B2B7-94543DF81A36}" type="datetimeFigureOut">
               <a:rPr lang="ru-RU" smtClean="0"/>
               <a:pPr/>
-              <a:t>21.12.2023</a:t>
+              <a:t>05.05.2026</a:t>
             </a:fld>
             <a:endParaRPr lang="ru-RU"/>
           </a:p>
@@ -2196,7 +2196,7 @@
             <a:fld id="{85A5DE44-605B-4D3B-B2B7-94543DF81A36}" type="datetimeFigureOut">
               <a:rPr lang="ru-RU" smtClean="0"/>
               <a:pPr/>
-              <a:t>21.12.2023</a:t>
+              <a:t>05.05.2026</a:t>
             </a:fld>
             <a:endParaRPr lang="ru-RU"/>
           </a:p>
@@ -2293,7 +2293,7 @@
             <a:fld id="{85A5DE44-605B-4D3B-B2B7-94543DF81A36}" type="datetimeFigureOut">
               <a:rPr lang="ru-RU" smtClean="0"/>
               <a:pPr/>
-              <a:t>21.12.2023</a:t>
+              <a:t>05.05.2026</a:t>
             </a:fld>
             <a:endParaRPr lang="ru-RU"/>
           </a:p>
@@ -2572,7 +2572,7 @@
             <a:fld id="{85A5DE44-605B-4D3B-B2B7-94543DF81A36}" type="datetimeFigureOut">
               <a:rPr lang="ru-RU" smtClean="0"/>
               <a:pPr/>
-              <a:t>21.12.2023</a:t>
+              <a:t>05.05.2026</a:t>
             </a:fld>
             <a:endParaRPr lang="ru-RU"/>
           </a:p>
@@ -2831,7 +2831,7 @@
             <a:fld id="{85A5DE44-605B-4D3B-B2B7-94543DF81A36}" type="datetimeFigureOut">
               <a:rPr lang="ru-RU" smtClean="0"/>
               <a:pPr/>
-              <a:t>21.12.2023</a:t>
+              <a:t>05.05.2026</a:t>
             </a:fld>
             <a:endParaRPr lang="ru-RU"/>
           </a:p>
@@ -3046,7 +3046,7 @@
             <a:fld id="{85A5DE44-605B-4D3B-B2B7-94543DF81A36}" type="datetimeFigureOut">
               <a:rPr lang="ru-RU" smtClean="0"/>
               <a:pPr/>
-              <a:t>21.12.2023</a:t>
+              <a:t>05.05.2026</a:t>
             </a:fld>
             <a:endParaRPr lang="ru-RU"/>
           </a:p>
@@ -3532,44 +3532,6 @@
           </a:fontRef>
         </p:style>
       </p:cxnSp>
-      <p:cxnSp>
-        <p:nvCxnSpPr>
-          <p:cNvPr id="636" name="Прямая соединительная линия 635"/>
-          <p:cNvCxnSpPr>
-            <a:stCxn id="801" idx="3"/>
-            <a:endCxn id="822" idx="1"/>
-          </p:cNvCxnSpPr>
-          <p:nvPr/>
-        </p:nvCxnSpPr>
-        <p:spPr>
-          <a:xfrm>
-            <a:off x="32090738" y="4089214"/>
-            <a:ext cx="18189337" cy="7837"/>
-          </a:xfrm>
-          <a:prstGeom prst="line">
-            <a:avLst/>
-          </a:prstGeom>
-          <a:ln w="19050">
-            <a:solidFill>
-              <a:srgbClr val="FF0000"/>
-            </a:solidFill>
-          </a:ln>
-        </p:spPr>
-        <p:style>
-          <a:lnRef idx="1">
-            <a:schemeClr val="accent1"/>
-          </a:lnRef>
-          <a:fillRef idx="0">
-            <a:schemeClr val="accent1"/>
-          </a:fillRef>
-          <a:effectRef idx="0">
-            <a:schemeClr val="accent1"/>
-          </a:effectRef>
-          <a:fontRef idx="minor">
-            <a:schemeClr val="tx1"/>
-          </a:fontRef>
-        </p:style>
-      </p:cxnSp>
       <p:sp>
         <p:nvSpPr>
           <p:cNvPr id="801" name="Прямоугольник 800"/>
@@ -3614,54 +3576,6 @@
             <a:r>
               <a:rPr lang="ru-RU" sz="700" dirty="0"/>
               <a:t>Победа Народного фронта</a:t>
-            </a:r>
-          </a:p>
-        </p:txBody>
-      </p:sp>
-      <p:sp>
-        <p:nvSpPr>
-          <p:cNvPr id="822" name="Прямоугольник 821"/>
-          <p:cNvSpPr/>
-          <p:nvPr/>
-        </p:nvSpPr>
-        <p:spPr>
-          <a:xfrm>
-            <a:off x="50280075" y="3827051"/>
-            <a:ext cx="926325" cy="540000"/>
-          </a:xfrm>
-          <a:prstGeom prst="rect">
-            <a:avLst/>
-          </a:prstGeom>
-          <a:solidFill>
-            <a:schemeClr val="accent1">
-              <a:lumMod val="60000"/>
-              <a:lumOff val="40000"/>
-            </a:schemeClr>
-          </a:solidFill>
-          <a:ln w="19050"/>
-        </p:spPr>
-        <p:style>
-          <a:lnRef idx="2">
-            <a:schemeClr val="accent1"/>
-          </a:lnRef>
-          <a:fillRef idx="1">
-            <a:schemeClr val="lt1"/>
-          </a:fillRef>
-          <a:effectRef idx="0">
-            <a:schemeClr val="accent1"/>
-          </a:effectRef>
-          <a:fontRef idx="minor">
-            <a:schemeClr val="dk1"/>
-          </a:fontRef>
-        </p:style>
-        <p:txBody>
-          <a:bodyPr lIns="124733" tIns="62367" rIns="124733" bIns="62367" rtlCol="0" anchor="ctr"/>
-          <a:lstStyle/>
-          <a:p>
-            <a:pPr algn="ctr"/>
-            <a:r>
-              <a:rPr lang="ru-RU" sz="700" dirty="0"/>
-              <a:t>Введение военного положения</a:t>
             </a:r>
           </a:p>
         </p:txBody>
@@ -4622,12 +4536,8 @@
           <a:p>
             <a:pPr algn="ctr"/>
             <a:r>
-              <a:rPr lang="ru-RU" sz="700" dirty="0" smtClean="0"/>
-              <a:t>Премьер-министр </a:t>
-            </a:r>
-            <a:r>
               <a:rPr lang="ru-RU" sz="700" dirty="0"/>
-              <a:t>Ларго </a:t>
+              <a:t>Премьер-министр Ларго </a:t>
             </a:r>
             <a:r>
               <a:rPr lang="ru-RU" sz="400" dirty="0"/>
@@ -8048,7 +7958,7 @@
           <p:cNvPr id="130" name="Прямоугольник 129">
             <a:extLst>
               <a:ext uri="{FF2B5EF4-FFF2-40B4-BE49-F238E27FC236}">
-                <a16:creationId xmlns="" xmlns:a16="http://schemas.microsoft.com/office/drawing/2014/main" id="{32EFE5A9-491B-46C7-9CCC-EC70745CA00A}"/>
+                <a16:creationId xmlns:a16="http://schemas.microsoft.com/office/drawing/2014/main" id="{32EFE5A9-491B-46C7-9CCC-EC70745CA00A}"/>
               </a:ext>
             </a:extLst>
           </p:cNvPr>
@@ -8102,7 +8012,7 @@
           <p:cNvPr id="133" name="Прямая соединительная линия 132">
             <a:extLst>
               <a:ext uri="{FF2B5EF4-FFF2-40B4-BE49-F238E27FC236}">
-                <a16:creationId xmlns="" xmlns:a16="http://schemas.microsoft.com/office/drawing/2014/main" id="{B210A86C-E791-474B-AD43-67AC3A2D8E92}"/>
+                <a16:creationId xmlns:a16="http://schemas.microsoft.com/office/drawing/2014/main" id="{B210A86C-E791-474B-AD43-67AC3A2D8E92}"/>
               </a:ext>
             </a:extLst>
           </p:cNvPr>
@@ -8147,7 +8057,7 @@
           <p:cNvPr id="107" name="Прямоугольник 106">
             <a:extLst>
               <a:ext uri="{FF2B5EF4-FFF2-40B4-BE49-F238E27FC236}">
-                <a16:creationId xmlns="" xmlns:a16="http://schemas.microsoft.com/office/drawing/2014/main" id="{B2FF6737-5293-4F39-BB5E-A666306D5E15}"/>
+                <a16:creationId xmlns:a16="http://schemas.microsoft.com/office/drawing/2014/main" id="{B2FF6737-5293-4F39-BB5E-A666306D5E15}"/>
               </a:ext>
             </a:extLst>
           </p:cNvPr>
@@ -8211,7 +8121,7 @@
           <p:cNvPr id="112" name="Прямоугольник 111">
             <a:extLst>
               <a:ext uri="{FF2B5EF4-FFF2-40B4-BE49-F238E27FC236}">
-                <a16:creationId xmlns="" xmlns:a16="http://schemas.microsoft.com/office/drawing/2014/main" id="{2B34BD92-035E-496F-BA59-E167AF97AB50}"/>
+                <a16:creationId xmlns:a16="http://schemas.microsoft.com/office/drawing/2014/main" id="{2B34BD92-035E-496F-BA59-E167AF97AB50}"/>
               </a:ext>
             </a:extLst>
           </p:cNvPr>
@@ -8275,7 +8185,7 @@
           <p:cNvPr id="135" name="Прямоугольник 134">
             <a:extLst>
               <a:ext uri="{FF2B5EF4-FFF2-40B4-BE49-F238E27FC236}">
-                <a16:creationId xmlns="" xmlns:a16="http://schemas.microsoft.com/office/drawing/2014/main" id="{3F73D485-85C1-4021-BF3A-F98C9D79AF9E}"/>
+                <a16:creationId xmlns:a16="http://schemas.microsoft.com/office/drawing/2014/main" id="{3F73D485-85C1-4021-BF3A-F98C9D79AF9E}"/>
               </a:ext>
             </a:extLst>
           </p:cNvPr>
@@ -8318,7 +8228,7 @@
           <a:p>
             <a:pPr algn="ctr"/>
             <a:r>
-              <a:rPr lang="ru-RU" sz="700" dirty="0" smtClean="0"/>
+              <a:rPr lang="ru-RU" sz="700" dirty="0"/>
               <a:t>Ввести коммунистов в правительство</a:t>
             </a:r>
             <a:endParaRPr lang="ru-RU" sz="500" dirty="0"/>
@@ -8330,7 +8240,7 @@
           <p:cNvPr id="153" name="Прямая соединительная линия 152">
             <a:extLst>
               <a:ext uri="{FF2B5EF4-FFF2-40B4-BE49-F238E27FC236}">
-                <a16:creationId xmlns="" xmlns:a16="http://schemas.microsoft.com/office/drawing/2014/main" id="{44D5A13D-ED90-4D47-9D98-6095F6E2D8DD}"/>
+                <a16:creationId xmlns:a16="http://schemas.microsoft.com/office/drawing/2014/main" id="{44D5A13D-ED90-4D47-9D98-6095F6E2D8DD}"/>
               </a:ext>
             </a:extLst>
           </p:cNvPr>
@@ -8375,7 +8285,7 @@
           <p:cNvPr id="154" name="Прямоугольник 153">
             <a:extLst>
               <a:ext uri="{FF2B5EF4-FFF2-40B4-BE49-F238E27FC236}">
-                <a16:creationId xmlns="" xmlns:a16="http://schemas.microsoft.com/office/drawing/2014/main" id="{1DE535CF-D5C4-47EA-8554-CD69456F19F1}"/>
+                <a16:creationId xmlns:a16="http://schemas.microsoft.com/office/drawing/2014/main" id="{1DE535CF-D5C4-47EA-8554-CD69456F19F1}"/>
               </a:ext>
             </a:extLst>
           </p:cNvPr>
@@ -8437,7 +8347,7 @@
           <p:cNvPr id="155" name="Прямоугольник 154">
             <a:extLst>
               <a:ext uri="{FF2B5EF4-FFF2-40B4-BE49-F238E27FC236}">
-                <a16:creationId xmlns="" xmlns:a16="http://schemas.microsoft.com/office/drawing/2014/main" id="{AE63F9D4-E3FE-49AD-A901-494855E870B6}"/>
+                <a16:creationId xmlns:a16="http://schemas.microsoft.com/office/drawing/2014/main" id="{AE63F9D4-E3FE-49AD-A901-494855E870B6}"/>
               </a:ext>
             </a:extLst>
           </p:cNvPr>
@@ -8499,7 +8409,7 @@
           <p:cNvPr id="156" name="Прямоугольник 155">
             <a:extLst>
               <a:ext uri="{FF2B5EF4-FFF2-40B4-BE49-F238E27FC236}">
-                <a16:creationId xmlns="" xmlns:a16="http://schemas.microsoft.com/office/drawing/2014/main" id="{6EDC6DCB-25E6-4101-87E3-6FE8795BB9DC}"/>
+                <a16:creationId xmlns:a16="http://schemas.microsoft.com/office/drawing/2014/main" id="{6EDC6DCB-25E6-4101-87E3-6FE8795BB9DC}"/>
               </a:ext>
             </a:extLst>
           </p:cNvPr>
@@ -8569,7 +8479,7 @@
           <p:cNvPr id="157" name="Соединительная линия уступом 59">
             <a:extLst>
               <a:ext uri="{FF2B5EF4-FFF2-40B4-BE49-F238E27FC236}">
-                <a16:creationId xmlns="" xmlns:a16="http://schemas.microsoft.com/office/drawing/2014/main" id="{ED19BEBE-D154-4028-B840-BC4A19EBF25A}"/>
+                <a16:creationId xmlns:a16="http://schemas.microsoft.com/office/drawing/2014/main" id="{ED19BEBE-D154-4028-B840-BC4A19EBF25A}"/>
               </a:ext>
             </a:extLst>
           </p:cNvPr>
@@ -8614,7 +8524,7 @@
           <p:cNvPr id="158" name="Соединительная линия уступом 59">
             <a:extLst>
               <a:ext uri="{FF2B5EF4-FFF2-40B4-BE49-F238E27FC236}">
-                <a16:creationId xmlns="" xmlns:a16="http://schemas.microsoft.com/office/drawing/2014/main" id="{7066AE11-5134-458C-89E0-082A59BB1B0F}"/>
+                <a16:creationId xmlns:a16="http://schemas.microsoft.com/office/drawing/2014/main" id="{7066AE11-5134-458C-89E0-082A59BB1B0F}"/>
               </a:ext>
             </a:extLst>
           </p:cNvPr>
@@ -8659,7 +8569,7 @@
           <p:cNvPr id="159" name="Прямоугольник 158">
             <a:extLst>
               <a:ext uri="{FF2B5EF4-FFF2-40B4-BE49-F238E27FC236}">
-                <a16:creationId xmlns="" xmlns:a16="http://schemas.microsoft.com/office/drawing/2014/main" id="{691AD626-DD8A-4A61-A88C-B3EB5598250C}"/>
+                <a16:creationId xmlns:a16="http://schemas.microsoft.com/office/drawing/2014/main" id="{691AD626-DD8A-4A61-A88C-B3EB5598250C}"/>
               </a:ext>
             </a:extLst>
           </p:cNvPr>
@@ -8737,7 +8647,7 @@
           <p:cNvPr id="160" name="Прямоугольник 159">
             <a:extLst>
               <a:ext uri="{FF2B5EF4-FFF2-40B4-BE49-F238E27FC236}">
-                <a16:creationId xmlns="" xmlns:a16="http://schemas.microsoft.com/office/drawing/2014/main" id="{2A50D594-2C2E-4BDC-8F6D-0BE0FE128D99}"/>
+                <a16:creationId xmlns:a16="http://schemas.microsoft.com/office/drawing/2014/main" id="{2A50D594-2C2E-4BDC-8F6D-0BE0FE128D99}"/>
               </a:ext>
             </a:extLst>
           </p:cNvPr>
@@ -8797,29 +8707,24 @@
             </a:r>
             <a:r>
               <a:rPr lang="ru-RU" sz="400" dirty="0"/>
-              <a:t> как </a:t>
-            </a:r>
-            <a:r>
-              <a:rPr lang="ru-RU" sz="400" dirty="0" smtClean="0"/>
-              <a:t>советник, </a:t>
-            </a:r>
-            <a:r>
-              <a:rPr lang="ru-RU" sz="400" dirty="0" err="1" smtClean="0"/>
+              <a:t> как советник, </a:t>
+            </a:r>
+            <a:r>
+              <a:rPr lang="ru-RU" sz="400" dirty="0" err="1"/>
               <a:t>влиняние</a:t>
             </a:r>
             <a:r>
-              <a:rPr lang="ru-RU" sz="400" dirty="0" smtClean="0"/>
+              <a:rPr lang="ru-RU" sz="400" dirty="0"/>
               <a:t> </a:t>
             </a:r>
             <a:r>
-              <a:rPr lang="ru-RU" sz="400" dirty="0" err="1" smtClean="0"/>
+              <a:rPr lang="ru-RU" sz="400" dirty="0" err="1"/>
               <a:t>коминтерна</a:t>
             </a:r>
             <a:r>
-              <a:rPr lang="ru-RU" sz="400" dirty="0" smtClean="0"/>
+              <a:rPr lang="ru-RU" sz="400" dirty="0"/>
               <a:t> должно быть убрано)</a:t>
             </a:r>
-            <a:endParaRPr lang="ru-RU" sz="400" dirty="0"/>
           </a:p>
         </p:txBody>
       </p:sp>
@@ -8828,7 +8733,7 @@
           <p:cNvPr id="161" name="Прямая соединительная линия 160">
             <a:extLst>
               <a:ext uri="{FF2B5EF4-FFF2-40B4-BE49-F238E27FC236}">
-                <a16:creationId xmlns="" xmlns:a16="http://schemas.microsoft.com/office/drawing/2014/main" id="{BF4D2C3F-BCB4-485D-98D8-A6C1B37BA272}"/>
+                <a16:creationId xmlns:a16="http://schemas.microsoft.com/office/drawing/2014/main" id="{BF4D2C3F-BCB4-485D-98D8-A6C1B37BA272}"/>
               </a:ext>
             </a:extLst>
           </p:cNvPr>
@@ -8873,7 +8778,7 @@
           <p:cNvPr id="162" name="Прямоугольник 161">
             <a:extLst>
               <a:ext uri="{FF2B5EF4-FFF2-40B4-BE49-F238E27FC236}">
-                <a16:creationId xmlns="" xmlns:a16="http://schemas.microsoft.com/office/drawing/2014/main" id="{0F278698-6314-41F4-905C-AAC488F37EAD}"/>
+                <a16:creationId xmlns:a16="http://schemas.microsoft.com/office/drawing/2014/main" id="{0F278698-6314-41F4-905C-AAC488F37EAD}"/>
               </a:ext>
             </a:extLst>
           </p:cNvPr>
@@ -8943,7 +8848,7 @@
           <p:cNvPr id="163" name="Соединительная линия уступом 59">
             <a:extLst>
               <a:ext uri="{FF2B5EF4-FFF2-40B4-BE49-F238E27FC236}">
-                <a16:creationId xmlns="" xmlns:a16="http://schemas.microsoft.com/office/drawing/2014/main" id="{41E480A3-A812-4731-BA0E-CEBFE1B527FF}"/>
+                <a16:creationId xmlns:a16="http://schemas.microsoft.com/office/drawing/2014/main" id="{41E480A3-A812-4731-BA0E-CEBFE1B527FF}"/>
               </a:ext>
             </a:extLst>
           </p:cNvPr>
@@ -8988,7 +8893,7 @@
           <p:cNvPr id="164" name="Прямоугольник 163">
             <a:extLst>
               <a:ext uri="{FF2B5EF4-FFF2-40B4-BE49-F238E27FC236}">
-                <a16:creationId xmlns="" xmlns:a16="http://schemas.microsoft.com/office/drawing/2014/main" id="{817CA413-A4A0-4A2F-9F7B-77FC6A4148F5}"/>
+                <a16:creationId xmlns:a16="http://schemas.microsoft.com/office/drawing/2014/main" id="{817CA413-A4A0-4A2F-9F7B-77FC6A4148F5}"/>
               </a:ext>
             </a:extLst>
           </p:cNvPr>
@@ -9079,7 +8984,7 @@
           <p:cNvPr id="165" name="Прямоугольник 164">
             <a:extLst>
               <a:ext uri="{FF2B5EF4-FFF2-40B4-BE49-F238E27FC236}">
-                <a16:creationId xmlns="" xmlns:a16="http://schemas.microsoft.com/office/drawing/2014/main" id="{FF2ECD0E-F830-493C-924F-6B0B2E2E822E}"/>
+                <a16:creationId xmlns:a16="http://schemas.microsoft.com/office/drawing/2014/main" id="{FF2ECD0E-F830-493C-924F-6B0B2E2E822E}"/>
               </a:ext>
             </a:extLst>
           </p:cNvPr>
@@ -9278,10 +9183,9 @@
               <a:t>Прието</a:t>
             </a:r>
             <a:r>
-              <a:rPr lang="ru-RU" sz="100" dirty="0" smtClean="0"/>
+              <a:rPr lang="ru-RU" sz="100" dirty="0"/>
               <a:t>.)</a:t>
             </a:r>
-            <a:endParaRPr lang="ru-RU" sz="100" dirty="0"/>
           </a:p>
         </p:txBody>
       </p:sp>
@@ -9290,7 +9194,7 @@
           <p:cNvPr id="166" name="Прямоугольник 165">
             <a:extLst>
               <a:ext uri="{FF2B5EF4-FFF2-40B4-BE49-F238E27FC236}">
-                <a16:creationId xmlns="" xmlns:a16="http://schemas.microsoft.com/office/drawing/2014/main" id="{1237210D-3F71-4FFB-898E-68BAEFE6FDDA}"/>
+                <a16:creationId xmlns:a16="http://schemas.microsoft.com/office/drawing/2014/main" id="{1237210D-3F71-4FFB-898E-68BAEFE6FDDA}"/>
               </a:ext>
             </a:extLst>
           </p:cNvPr>
@@ -9344,7 +9248,7 @@
           <p:cNvPr id="167" name="Соединительная линия уступом 59">
             <a:extLst>
               <a:ext uri="{FF2B5EF4-FFF2-40B4-BE49-F238E27FC236}">
-                <a16:creationId xmlns="" xmlns:a16="http://schemas.microsoft.com/office/drawing/2014/main" id="{8BF20860-5267-4C89-9A69-5F2FF8043CE3}"/>
+                <a16:creationId xmlns:a16="http://schemas.microsoft.com/office/drawing/2014/main" id="{8BF20860-5267-4C89-9A69-5F2FF8043CE3}"/>
               </a:ext>
             </a:extLst>
           </p:cNvPr>
@@ -9389,7 +9293,7 @@
           <p:cNvPr id="168" name="Соединительная линия уступом 59">
             <a:extLst>
               <a:ext uri="{FF2B5EF4-FFF2-40B4-BE49-F238E27FC236}">
-                <a16:creationId xmlns="" xmlns:a16="http://schemas.microsoft.com/office/drawing/2014/main" id="{8BB7AA36-FD11-40F3-952A-FDE960A6929F}"/>
+                <a16:creationId xmlns:a16="http://schemas.microsoft.com/office/drawing/2014/main" id="{8BB7AA36-FD11-40F3-952A-FDE960A6929F}"/>
               </a:ext>
             </a:extLst>
           </p:cNvPr>
@@ -9434,7 +9338,7 @@
           <p:cNvPr id="169" name="Соединительная линия уступом 60">
             <a:extLst>
               <a:ext uri="{FF2B5EF4-FFF2-40B4-BE49-F238E27FC236}">
-                <a16:creationId xmlns="" xmlns:a16="http://schemas.microsoft.com/office/drawing/2014/main" id="{504572F0-7FA5-4F81-9D4B-C3FB5F7E24A6}"/>
+                <a16:creationId xmlns:a16="http://schemas.microsoft.com/office/drawing/2014/main" id="{504572F0-7FA5-4F81-9D4B-C3FB5F7E24A6}"/>
               </a:ext>
             </a:extLst>
           </p:cNvPr>
@@ -9479,7 +9383,7 @@
           <p:cNvPr id="171" name="Соединительная линия уступом 123">
             <a:extLst>
               <a:ext uri="{FF2B5EF4-FFF2-40B4-BE49-F238E27FC236}">
-                <a16:creationId xmlns="" xmlns:a16="http://schemas.microsoft.com/office/drawing/2014/main" id="{0DD383AF-7358-4D05-9F30-B6B41AF854DB}"/>
+                <a16:creationId xmlns:a16="http://schemas.microsoft.com/office/drawing/2014/main" id="{0DD383AF-7358-4D05-9F30-B6B41AF854DB}"/>
               </a:ext>
             </a:extLst>
           </p:cNvPr>
@@ -9524,7 +9428,7 @@
           <p:cNvPr id="173" name="Соединительная линия уступом 123">
             <a:extLst>
               <a:ext uri="{FF2B5EF4-FFF2-40B4-BE49-F238E27FC236}">
-                <a16:creationId xmlns="" xmlns:a16="http://schemas.microsoft.com/office/drawing/2014/main" id="{08826EB2-04D8-4B9D-A85C-F5AB140406B1}"/>
+                <a16:creationId xmlns:a16="http://schemas.microsoft.com/office/drawing/2014/main" id="{08826EB2-04D8-4B9D-A85C-F5AB140406B1}"/>
               </a:ext>
             </a:extLst>
           </p:cNvPr>
@@ -9569,7 +9473,7 @@
           <p:cNvPr id="177" name="Соединительная линия уступом 59">
             <a:extLst>
               <a:ext uri="{FF2B5EF4-FFF2-40B4-BE49-F238E27FC236}">
-                <a16:creationId xmlns="" xmlns:a16="http://schemas.microsoft.com/office/drawing/2014/main" id="{76206442-5802-4ECC-89FF-725CB9831F7E}"/>
+                <a16:creationId xmlns:a16="http://schemas.microsoft.com/office/drawing/2014/main" id="{76206442-5802-4ECC-89FF-725CB9831F7E}"/>
               </a:ext>
             </a:extLst>
           </p:cNvPr>
@@ -9615,7 +9519,7 @@
           <p:cNvPr id="180" name="Прямоугольник 179">
             <a:extLst>
               <a:ext uri="{FF2B5EF4-FFF2-40B4-BE49-F238E27FC236}">
-                <a16:creationId xmlns="" xmlns:a16="http://schemas.microsoft.com/office/drawing/2014/main" id="{7DAEAC1F-B20B-46CD-B818-99851DE5EF87}"/>
+                <a16:creationId xmlns:a16="http://schemas.microsoft.com/office/drawing/2014/main" id="{7DAEAC1F-B20B-46CD-B818-99851DE5EF87}"/>
               </a:ext>
             </a:extLst>
           </p:cNvPr>
@@ -9669,7 +9573,7 @@
           <p:cNvPr id="181" name="Соединительная линия уступом 59">
             <a:extLst>
               <a:ext uri="{FF2B5EF4-FFF2-40B4-BE49-F238E27FC236}">
-                <a16:creationId xmlns="" xmlns:a16="http://schemas.microsoft.com/office/drawing/2014/main" id="{146CBA15-0EC9-4B49-9151-897C0373358B}"/>
+                <a16:creationId xmlns:a16="http://schemas.microsoft.com/office/drawing/2014/main" id="{146CBA15-0EC9-4B49-9151-897C0373358B}"/>
               </a:ext>
             </a:extLst>
           </p:cNvPr>
@@ -9714,7 +9618,7 @@
           <p:cNvPr id="184" name="Соединительная линия уступом 59">
             <a:extLst>
               <a:ext uri="{FF2B5EF4-FFF2-40B4-BE49-F238E27FC236}">
-                <a16:creationId xmlns="" xmlns:a16="http://schemas.microsoft.com/office/drawing/2014/main" id="{C84E4D7F-D864-4DC0-BB2F-86D444193691}"/>
+                <a16:creationId xmlns:a16="http://schemas.microsoft.com/office/drawing/2014/main" id="{C84E4D7F-D864-4DC0-BB2F-86D444193691}"/>
               </a:ext>
             </a:extLst>
           </p:cNvPr>
@@ -9760,7 +9664,7 @@
           <p:cNvPr id="187" name="Соединительная линия уступом 59">
             <a:extLst>
               <a:ext uri="{FF2B5EF4-FFF2-40B4-BE49-F238E27FC236}">
-                <a16:creationId xmlns="" xmlns:a16="http://schemas.microsoft.com/office/drawing/2014/main" id="{047E7F83-180D-4C03-BC66-692FB1C56DBF}"/>
+                <a16:creationId xmlns:a16="http://schemas.microsoft.com/office/drawing/2014/main" id="{047E7F83-180D-4C03-BC66-692FB1C56DBF}"/>
               </a:ext>
             </a:extLst>
           </p:cNvPr>
@@ -9806,7 +9710,7 @@
           <p:cNvPr id="200" name="Прямоугольник 199">
             <a:extLst>
               <a:ext uri="{FF2B5EF4-FFF2-40B4-BE49-F238E27FC236}">
-                <a16:creationId xmlns="" xmlns:a16="http://schemas.microsoft.com/office/drawing/2014/main" id="{E605C39C-68E5-47BE-BB9B-455D1E372FDC}"/>
+                <a16:creationId xmlns:a16="http://schemas.microsoft.com/office/drawing/2014/main" id="{E605C39C-68E5-47BE-BB9B-455D1E372FDC}"/>
               </a:ext>
             </a:extLst>
           </p:cNvPr>
@@ -9860,7 +9764,7 @@
           <p:cNvPr id="201" name="Прямоугольник 200">
             <a:extLst>
               <a:ext uri="{FF2B5EF4-FFF2-40B4-BE49-F238E27FC236}">
-                <a16:creationId xmlns="" xmlns:a16="http://schemas.microsoft.com/office/drawing/2014/main" id="{7F4404B0-4AD2-46F4-AED9-158653BD1476}"/>
+                <a16:creationId xmlns:a16="http://schemas.microsoft.com/office/drawing/2014/main" id="{7F4404B0-4AD2-46F4-AED9-158653BD1476}"/>
               </a:ext>
             </a:extLst>
           </p:cNvPr>
@@ -9914,7 +9818,7 @@
           <p:cNvPr id="202" name="Соединительная линия уступом 123">
             <a:extLst>
               <a:ext uri="{FF2B5EF4-FFF2-40B4-BE49-F238E27FC236}">
-                <a16:creationId xmlns="" xmlns:a16="http://schemas.microsoft.com/office/drawing/2014/main" id="{95E12289-D5C4-4A71-B46E-2AB617265BCE}"/>
+                <a16:creationId xmlns:a16="http://schemas.microsoft.com/office/drawing/2014/main" id="{95E12289-D5C4-4A71-B46E-2AB617265BCE}"/>
               </a:ext>
             </a:extLst>
           </p:cNvPr>
@@ -9959,7 +9863,7 @@
           <p:cNvPr id="205" name="Соединительная линия уступом 123">
             <a:extLst>
               <a:ext uri="{FF2B5EF4-FFF2-40B4-BE49-F238E27FC236}">
-                <a16:creationId xmlns="" xmlns:a16="http://schemas.microsoft.com/office/drawing/2014/main" id="{57A7C273-2588-4AC4-A707-30CFC6E5A3DB}"/>
+                <a16:creationId xmlns:a16="http://schemas.microsoft.com/office/drawing/2014/main" id="{57A7C273-2588-4AC4-A707-30CFC6E5A3DB}"/>
               </a:ext>
             </a:extLst>
           </p:cNvPr>
@@ -10004,7 +9908,7 @@
           <p:cNvPr id="208" name="Прямоугольник 207">
             <a:extLst>
               <a:ext uri="{FF2B5EF4-FFF2-40B4-BE49-F238E27FC236}">
-                <a16:creationId xmlns="" xmlns:a16="http://schemas.microsoft.com/office/drawing/2014/main" id="{3A936EB0-2B9C-480D-9F08-95DEDCB36930}"/>
+                <a16:creationId xmlns:a16="http://schemas.microsoft.com/office/drawing/2014/main" id="{3A936EB0-2B9C-480D-9F08-95DEDCB36930}"/>
               </a:ext>
             </a:extLst>
           </p:cNvPr>
@@ -10071,7 +9975,7 @@
           <p:cNvPr id="209" name="Соединительная линия уступом 123">
             <a:extLst>
               <a:ext uri="{FF2B5EF4-FFF2-40B4-BE49-F238E27FC236}">
-                <a16:creationId xmlns="" xmlns:a16="http://schemas.microsoft.com/office/drawing/2014/main" id="{14ADE0B2-43D1-4891-AD9B-AD5F899987C4}"/>
+                <a16:creationId xmlns:a16="http://schemas.microsoft.com/office/drawing/2014/main" id="{14ADE0B2-43D1-4891-AD9B-AD5F899987C4}"/>
               </a:ext>
             </a:extLst>
           </p:cNvPr>
@@ -10116,7 +10020,7 @@
           <p:cNvPr id="223" name="Соединительная линия уступом 613">
             <a:extLst>
               <a:ext uri="{FF2B5EF4-FFF2-40B4-BE49-F238E27FC236}">
-                <a16:creationId xmlns="" xmlns:a16="http://schemas.microsoft.com/office/drawing/2014/main" id="{1344A1AC-A5D1-48D7-874F-0EA6B3953523}"/>
+                <a16:creationId xmlns:a16="http://schemas.microsoft.com/office/drawing/2014/main" id="{1344A1AC-A5D1-48D7-874F-0EA6B3953523}"/>
               </a:ext>
             </a:extLst>
           </p:cNvPr>
@@ -10161,7 +10065,7 @@
           <p:cNvPr id="226" name="Прямоугольник 225">
             <a:extLst>
               <a:ext uri="{FF2B5EF4-FFF2-40B4-BE49-F238E27FC236}">
-                <a16:creationId xmlns="" xmlns:a16="http://schemas.microsoft.com/office/drawing/2014/main" id="{F8D1DA47-C504-41CD-B91F-0C23B929D953}"/>
+                <a16:creationId xmlns:a16="http://schemas.microsoft.com/office/drawing/2014/main" id="{F8D1DA47-C504-41CD-B91F-0C23B929D953}"/>
               </a:ext>
             </a:extLst>
           </p:cNvPr>
@@ -10205,11 +10109,7 @@
             <a:pPr algn="ctr"/>
             <a:r>
               <a:rPr lang="ru-RU" sz="700" dirty="0"/>
-              <a:t>Вооружить рабочее ополчение (наше</a:t>
-            </a:r>
-            <a:r>
-              <a:rPr lang="ru-RU" sz="700" dirty="0" smtClean="0"/>
-              <a:t>)</a:t>
+              <a:t>Вооружить рабочее ополчение (наше)</a:t>
             </a:r>
             <a:endParaRPr lang="ru-RU" sz="500" dirty="0"/>
           </a:p>
@@ -10220,7 +10120,7 @@
           <p:cNvPr id="227" name="Соединительная линия уступом 123">
             <a:extLst>
               <a:ext uri="{FF2B5EF4-FFF2-40B4-BE49-F238E27FC236}">
-                <a16:creationId xmlns="" xmlns:a16="http://schemas.microsoft.com/office/drawing/2014/main" id="{C9CBB17B-538D-4A64-A825-8B7B2B897D5D}"/>
+                <a16:creationId xmlns:a16="http://schemas.microsoft.com/office/drawing/2014/main" id="{C9CBB17B-538D-4A64-A825-8B7B2B897D5D}"/>
               </a:ext>
             </a:extLst>
           </p:cNvPr>
@@ -10265,7 +10165,7 @@
           <p:cNvPr id="230" name="Прямоугольник 229">
             <a:extLst>
               <a:ext uri="{FF2B5EF4-FFF2-40B4-BE49-F238E27FC236}">
-                <a16:creationId xmlns="" xmlns:a16="http://schemas.microsoft.com/office/drawing/2014/main" id="{600D8C74-F74F-4295-8359-52067A77D9AA}"/>
+                <a16:creationId xmlns:a16="http://schemas.microsoft.com/office/drawing/2014/main" id="{600D8C74-F74F-4295-8359-52067A77D9AA}"/>
               </a:ext>
             </a:extLst>
           </p:cNvPr>
@@ -10320,7 +10220,7 @@
           <p:cNvPr id="231" name="Соединительная линия уступом 105">
             <a:extLst>
               <a:ext uri="{FF2B5EF4-FFF2-40B4-BE49-F238E27FC236}">
-                <a16:creationId xmlns="" xmlns:a16="http://schemas.microsoft.com/office/drawing/2014/main" id="{2527D34A-E27A-449A-93E5-C76A76CC4512}"/>
+                <a16:creationId xmlns:a16="http://schemas.microsoft.com/office/drawing/2014/main" id="{2527D34A-E27A-449A-93E5-C76A76CC4512}"/>
               </a:ext>
             </a:extLst>
           </p:cNvPr>
@@ -10365,7 +10265,7 @@
           <p:cNvPr id="152" name="Соединительная линия уступом 836">
             <a:extLst>
               <a:ext uri="{FF2B5EF4-FFF2-40B4-BE49-F238E27FC236}">
-                <a16:creationId xmlns="" xmlns:a16="http://schemas.microsoft.com/office/drawing/2014/main" id="{6F719142-1860-4581-9B41-8AADCCCE4BB0}"/>
+                <a16:creationId xmlns:a16="http://schemas.microsoft.com/office/drawing/2014/main" id="{6F719142-1860-4581-9B41-8AADCCCE4BB0}"/>
               </a:ext>
             </a:extLst>
           </p:cNvPr>
@@ -10411,7 +10311,7 @@
           <p:cNvPr id="170" name="Соединительная линия уступом 836">
             <a:extLst>
               <a:ext uri="{FF2B5EF4-FFF2-40B4-BE49-F238E27FC236}">
-                <a16:creationId xmlns="" xmlns:a16="http://schemas.microsoft.com/office/drawing/2014/main" id="{EA3FC01F-F5CA-4FAE-8CEF-830AB1AAFB40}"/>
+                <a16:creationId xmlns:a16="http://schemas.microsoft.com/office/drawing/2014/main" id="{EA3FC01F-F5CA-4FAE-8CEF-830AB1AAFB40}"/>
               </a:ext>
             </a:extLst>
           </p:cNvPr>
@@ -10457,7 +10357,7 @@
           <p:cNvPr id="172" name="Соединительная линия уступом 836">
             <a:extLst>
               <a:ext uri="{FF2B5EF4-FFF2-40B4-BE49-F238E27FC236}">
-                <a16:creationId xmlns="" xmlns:a16="http://schemas.microsoft.com/office/drawing/2014/main" id="{6B629A61-C117-4B2E-9AEF-4EAF601A5B2F}"/>
+                <a16:creationId xmlns:a16="http://schemas.microsoft.com/office/drawing/2014/main" id="{6B629A61-C117-4B2E-9AEF-4EAF601A5B2F}"/>
               </a:ext>
             </a:extLst>
           </p:cNvPr>
@@ -10503,7 +10403,7 @@
           <p:cNvPr id="174" name="Прямоугольник 173">
             <a:extLst>
               <a:ext uri="{FF2B5EF4-FFF2-40B4-BE49-F238E27FC236}">
-                <a16:creationId xmlns="" xmlns:a16="http://schemas.microsoft.com/office/drawing/2014/main" id="{957C12DC-D98B-4948-99D2-CFC7B8CFF4DE}"/>
+                <a16:creationId xmlns:a16="http://schemas.microsoft.com/office/drawing/2014/main" id="{957C12DC-D98B-4948-99D2-CFC7B8CFF4DE}"/>
               </a:ext>
             </a:extLst>
           </p:cNvPr>
@@ -10557,7 +10457,7 @@
           <p:cNvPr id="175" name="Прямоугольник 174">
             <a:extLst>
               <a:ext uri="{FF2B5EF4-FFF2-40B4-BE49-F238E27FC236}">
-                <a16:creationId xmlns="" xmlns:a16="http://schemas.microsoft.com/office/drawing/2014/main" id="{012D2E35-685E-4576-BCB6-C08D33426D27}"/>
+                <a16:creationId xmlns:a16="http://schemas.microsoft.com/office/drawing/2014/main" id="{012D2E35-685E-4576-BCB6-C08D33426D27}"/>
               </a:ext>
             </a:extLst>
           </p:cNvPr>
@@ -10611,7 +10511,7 @@
           <p:cNvPr id="176" name="Прямоугольник 175">
             <a:extLst>
               <a:ext uri="{FF2B5EF4-FFF2-40B4-BE49-F238E27FC236}">
-                <a16:creationId xmlns="" xmlns:a16="http://schemas.microsoft.com/office/drawing/2014/main" id="{05CD8A58-5676-43E8-BBE2-DC9229365C21}"/>
+                <a16:creationId xmlns:a16="http://schemas.microsoft.com/office/drawing/2014/main" id="{05CD8A58-5676-43E8-BBE2-DC9229365C21}"/>
               </a:ext>
             </a:extLst>
           </p:cNvPr>
@@ -10665,7 +10565,7 @@
           <p:cNvPr id="178" name="Прямоугольник 177">
             <a:extLst>
               <a:ext uri="{FF2B5EF4-FFF2-40B4-BE49-F238E27FC236}">
-                <a16:creationId xmlns="" xmlns:a16="http://schemas.microsoft.com/office/drawing/2014/main" id="{E01090B5-7811-4C8D-B542-DC3489C9632C}"/>
+                <a16:creationId xmlns:a16="http://schemas.microsoft.com/office/drawing/2014/main" id="{E01090B5-7811-4C8D-B542-DC3489C9632C}"/>
               </a:ext>
             </a:extLst>
           </p:cNvPr>
@@ -10719,7 +10619,7 @@
           <p:cNvPr id="182" name="Прямоугольник 181">
             <a:extLst>
               <a:ext uri="{FF2B5EF4-FFF2-40B4-BE49-F238E27FC236}">
-                <a16:creationId xmlns="" xmlns:a16="http://schemas.microsoft.com/office/drawing/2014/main" id="{206D4D82-F261-452F-8D95-439FE5E0314A}"/>
+                <a16:creationId xmlns:a16="http://schemas.microsoft.com/office/drawing/2014/main" id="{206D4D82-F261-452F-8D95-439FE5E0314A}"/>
               </a:ext>
             </a:extLst>
           </p:cNvPr>
@@ -10762,10 +10662,9 @@
           <a:p>
             <a:pPr algn="ctr"/>
             <a:r>
-              <a:rPr lang="ru-RU" sz="700" dirty="0" smtClean="0"/>
+              <a:rPr lang="ru-RU" sz="700" dirty="0"/>
               <a:t>Вновь объединить Испанию !</a:t>
             </a:r>
-            <a:endParaRPr lang="ru-RU" sz="700" dirty="0"/>
           </a:p>
         </p:txBody>
       </p:sp>
@@ -10774,7 +10673,7 @@
           <p:cNvPr id="183" name="Соединительная линия уступом 148">
             <a:extLst>
               <a:ext uri="{FF2B5EF4-FFF2-40B4-BE49-F238E27FC236}">
-                <a16:creationId xmlns="" xmlns:a16="http://schemas.microsoft.com/office/drawing/2014/main" id="{74F58D4E-63E8-4F3B-AADA-F89E80EB0D7E}"/>
+                <a16:creationId xmlns:a16="http://schemas.microsoft.com/office/drawing/2014/main" id="{74F58D4E-63E8-4F3B-AADA-F89E80EB0D7E}"/>
               </a:ext>
             </a:extLst>
           </p:cNvPr>
@@ -10819,7 +10718,7 @@
           <p:cNvPr id="185" name="Соединительная линия уступом 53">
             <a:extLst>
               <a:ext uri="{FF2B5EF4-FFF2-40B4-BE49-F238E27FC236}">
-                <a16:creationId xmlns="" xmlns:a16="http://schemas.microsoft.com/office/drawing/2014/main" id="{B661D22E-E444-4030-8910-C32F43264B7E}"/>
+                <a16:creationId xmlns:a16="http://schemas.microsoft.com/office/drawing/2014/main" id="{B661D22E-E444-4030-8910-C32F43264B7E}"/>
               </a:ext>
             </a:extLst>
           </p:cNvPr>
@@ -10864,7 +10763,7 @@
           <p:cNvPr id="186" name="Соединительная линия уступом 148">
             <a:extLst>
               <a:ext uri="{FF2B5EF4-FFF2-40B4-BE49-F238E27FC236}">
-                <a16:creationId xmlns="" xmlns:a16="http://schemas.microsoft.com/office/drawing/2014/main" id="{D9F54EA9-8E35-4F97-9346-ECC1DCF56114}"/>
+                <a16:creationId xmlns:a16="http://schemas.microsoft.com/office/drawing/2014/main" id="{D9F54EA9-8E35-4F97-9346-ECC1DCF56114}"/>
               </a:ext>
             </a:extLst>
           </p:cNvPr>
@@ -10909,7 +10808,7 @@
           <p:cNvPr id="188" name="Соединительная линия уступом 148">
             <a:extLst>
               <a:ext uri="{FF2B5EF4-FFF2-40B4-BE49-F238E27FC236}">
-                <a16:creationId xmlns="" xmlns:a16="http://schemas.microsoft.com/office/drawing/2014/main" id="{46D280CB-FB83-4BF5-8B3A-DD7BD44AD1E7}"/>
+                <a16:creationId xmlns:a16="http://schemas.microsoft.com/office/drawing/2014/main" id="{46D280CB-FB83-4BF5-8B3A-DD7BD44AD1E7}"/>
               </a:ext>
             </a:extLst>
           </p:cNvPr>
@@ -10954,7 +10853,7 @@
           <p:cNvPr id="189" name="Соединительная линия уступом 148">
             <a:extLst>
               <a:ext uri="{FF2B5EF4-FFF2-40B4-BE49-F238E27FC236}">
-                <a16:creationId xmlns="" xmlns:a16="http://schemas.microsoft.com/office/drawing/2014/main" id="{1C6858C7-8A93-4CF4-A3B3-6AB28CD215CB}"/>
+                <a16:creationId xmlns:a16="http://schemas.microsoft.com/office/drawing/2014/main" id="{1C6858C7-8A93-4CF4-A3B3-6AB28CD215CB}"/>
               </a:ext>
             </a:extLst>
           </p:cNvPr>
@@ -10999,7 +10898,7 @@
           <p:cNvPr id="190" name="Соединительная линия уступом 148">
             <a:extLst>
               <a:ext uri="{FF2B5EF4-FFF2-40B4-BE49-F238E27FC236}">
-                <a16:creationId xmlns="" xmlns:a16="http://schemas.microsoft.com/office/drawing/2014/main" id="{CE2B2ACF-3CBE-48FA-AC43-7AD4B70A3FA6}"/>
+                <a16:creationId xmlns:a16="http://schemas.microsoft.com/office/drawing/2014/main" id="{CE2B2ACF-3CBE-48FA-AC43-7AD4B70A3FA6}"/>
               </a:ext>
             </a:extLst>
           </p:cNvPr>
@@ -11044,7 +10943,7 @@
           <p:cNvPr id="148" name="Прямоугольник 147">
             <a:extLst>
               <a:ext uri="{FF2B5EF4-FFF2-40B4-BE49-F238E27FC236}">
-                <a16:creationId xmlns="" xmlns:a16="http://schemas.microsoft.com/office/drawing/2014/main" id="{04A3ABFC-37BA-432F-AC1A-F77E6E1C51AC}"/>
+                <a16:creationId xmlns:a16="http://schemas.microsoft.com/office/drawing/2014/main" id="{04A3ABFC-37BA-432F-AC1A-F77E6E1C51AC}"/>
               </a:ext>
             </a:extLst>
           </p:cNvPr>
@@ -11189,7 +11088,7 @@
           <p:cNvPr id="191" name="Соединительная линия уступом 123">
             <a:extLst>
               <a:ext uri="{FF2B5EF4-FFF2-40B4-BE49-F238E27FC236}">
-                <a16:creationId xmlns="" xmlns:a16="http://schemas.microsoft.com/office/drawing/2014/main" id="{C9CBB17B-538D-4A64-A825-8B7B2B897D5D}"/>
+                <a16:creationId xmlns:a16="http://schemas.microsoft.com/office/drawing/2014/main" id="{C9CBB17B-538D-4A64-A825-8B7B2B897D5D}"/>
               </a:ext>
             </a:extLst>
           </p:cNvPr>
@@ -11309,7 +11208,7 @@
           <a:p>
             <a:pPr algn="ctr"/>
             <a:r>
-              <a:rPr lang="ru-RU" sz="700" dirty="0" smtClean="0"/>
+              <a:rPr lang="ru-RU" sz="700" dirty="0"/>
               <a:t>Университет Наварры (1952)</a:t>
             </a:r>
             <a:endParaRPr lang="ru-RU" sz="500" dirty="0"/>
@@ -11321,7 +11220,7 @@
           <p:cNvPr id="194" name="Прямоугольник 193">
             <a:extLst>
               <a:ext uri="{FF2B5EF4-FFF2-40B4-BE49-F238E27FC236}">
-                <a16:creationId xmlns="" xmlns:a16="http://schemas.microsoft.com/office/drawing/2014/main" id="{F8D1DA47-C504-41CD-B91F-0C23B929D953}"/>
+                <a16:creationId xmlns:a16="http://schemas.microsoft.com/office/drawing/2014/main" id="{F8D1DA47-C504-41CD-B91F-0C23B929D953}"/>
               </a:ext>
             </a:extLst>
           </p:cNvPr>
@@ -11361,16 +11260,12 @@
           <a:p>
             <a:pPr algn="ctr"/>
             <a:r>
-              <a:rPr lang="ru-RU" sz="700" dirty="0" smtClean="0"/>
+              <a:rPr lang="ru-RU" sz="700" dirty="0"/>
               <a:t>Объединение партий </a:t>
             </a:r>
             <a:r>
-              <a:rPr lang="ru-RU" sz="100" dirty="0" smtClean="0"/>
-              <a:t>Что </a:t>
-            </a:r>
-            <a:r>
               <a:rPr lang="ru-RU" sz="100" dirty="0"/>
-              <a:t>же до социалистов, то UGT (членство в котором выросло до двух миллионов) теперь установил тесное сотрудничество с коммунистами. Всю зиму коммунисты добивались объединения социалистической и коммунистической партий в соответствии с той моделью, которая существовала в Каталонии и в молодежном движении. Оба крыла социалистической партии, и Ларго Кабальеро и </a:t>
+              <a:t>Что же до социалистов, то UGT (членство в котором выросло до двух миллионов) теперь установил тесное сотрудничество с коммунистами. Всю зиму коммунисты добивались объединения социалистической и коммунистической партий в соответствии с той моделью, которая существовала в Каталонии и в молодежном движении. Оба крыла социалистической партии, и Ларго Кабальеро и </a:t>
             </a:r>
             <a:r>
               <a:rPr lang="ru-RU" sz="100" dirty="0" err="1"/>
@@ -11433,12 +11328,8 @@
           <a:p>
             <a:pPr algn="ctr"/>
             <a:r>
-              <a:rPr lang="ru-RU" sz="700" dirty="0" smtClean="0"/>
-              <a:t>Военные школы </a:t>
-            </a:r>
-            <a:r>
               <a:rPr lang="ru-RU" sz="700" dirty="0"/>
-              <a:t>для милиционеров (1937) </a:t>
+              <a:t>Военные школы для милиционеров (1937) </a:t>
             </a:r>
             <a:r>
               <a:rPr lang="ru-RU" sz="200" dirty="0"/>
@@ -11453,7 +11344,7 @@
           <p:cNvPr id="196" name="Прямоугольник 195">
             <a:extLst>
               <a:ext uri="{FF2B5EF4-FFF2-40B4-BE49-F238E27FC236}">
-                <a16:creationId xmlns="" xmlns:a16="http://schemas.microsoft.com/office/drawing/2014/main" id="{F8D1DA47-C504-41CD-B91F-0C23B929D953}"/>
+                <a16:creationId xmlns:a16="http://schemas.microsoft.com/office/drawing/2014/main" id="{F8D1DA47-C504-41CD-B91F-0C23B929D953}"/>
               </a:ext>
             </a:extLst>
           </p:cNvPr>
@@ -11493,16 +11384,12 @@
           <a:p>
             <a:pPr algn="ctr"/>
             <a:r>
-              <a:rPr lang="ru-RU" sz="700" dirty="0" smtClean="0"/>
+              <a:rPr lang="ru-RU" sz="700" dirty="0"/>
               <a:t>Отстранение Ларго </a:t>
             </a:r>
             <a:r>
-              <a:rPr lang="ru-RU" sz="100" dirty="0" smtClean="0"/>
-              <a:t>(</a:t>
-            </a:r>
-            <a:r>
               <a:rPr lang="ru-RU" sz="100" dirty="0"/>
-              <a:t>Вскоре состоялось удивительное собрание руководства Испанской коммунистической партии, на котором присутствовали Марти, Тольятти, </a:t>
+              <a:t>(Вскоре состоялось удивительное собрание руководства Испанской коммунистической партии, на котором присутствовали Марти, Тольятти, </a:t>
             </a:r>
             <a:r>
               <a:rPr lang="ru-RU" sz="100" dirty="0" err="1"/>
@@ -11685,10 +11572,9 @@
               <a:t>Прието</a:t>
             </a:r>
             <a:r>
-              <a:rPr lang="ru-RU" sz="100" dirty="0" smtClean="0"/>
+              <a:rPr lang="ru-RU" sz="100" dirty="0"/>
               <a:t>)</a:t>
             </a:r>
-            <a:endParaRPr lang="ru-RU" sz="100" dirty="0"/>
           </a:p>
         </p:txBody>
       </p:sp>
@@ -11697,7 +11583,7 @@
           <p:cNvPr id="198" name="Прямоугольник 197">
             <a:extLst>
               <a:ext uri="{FF2B5EF4-FFF2-40B4-BE49-F238E27FC236}">
-                <a16:creationId xmlns="" xmlns:a16="http://schemas.microsoft.com/office/drawing/2014/main" id="{3F73D485-85C1-4021-BF3A-F98C9D79AF9E}"/>
+                <a16:creationId xmlns:a16="http://schemas.microsoft.com/office/drawing/2014/main" id="{3F73D485-85C1-4021-BF3A-F98C9D79AF9E}"/>
               </a:ext>
             </a:extLst>
           </p:cNvPr>
@@ -11748,7 +11634,7 @@
           <a:p>
             <a:pPr algn="ctr"/>
             <a:r>
-              <a:rPr lang="ru-RU" sz="700" dirty="0" smtClean="0"/>
+              <a:rPr lang="ru-RU" sz="700" dirty="0"/>
               <a:t>Сотрудничество с советским НКВД</a:t>
             </a:r>
             <a:endParaRPr lang="ru-RU" sz="500" dirty="0"/>
@@ -11760,7 +11646,7 @@
           <p:cNvPr id="199" name="Соединительная линия уступом 59">
             <a:extLst>
               <a:ext uri="{FF2B5EF4-FFF2-40B4-BE49-F238E27FC236}">
-                <a16:creationId xmlns="" xmlns:a16="http://schemas.microsoft.com/office/drawing/2014/main" id="{76206442-5802-4ECC-89FF-725CB9831F7E}"/>
+                <a16:creationId xmlns:a16="http://schemas.microsoft.com/office/drawing/2014/main" id="{76206442-5802-4ECC-89FF-725CB9831F7E}"/>
               </a:ext>
             </a:extLst>
           </p:cNvPr>
@@ -11806,7 +11692,7 @@
           <p:cNvPr id="203" name="Соединительная линия уступом 59">
             <a:extLst>
               <a:ext uri="{FF2B5EF4-FFF2-40B4-BE49-F238E27FC236}">
-                <a16:creationId xmlns="" xmlns:a16="http://schemas.microsoft.com/office/drawing/2014/main" id="{76206442-5802-4ECC-89FF-725CB9831F7E}"/>
+                <a16:creationId xmlns:a16="http://schemas.microsoft.com/office/drawing/2014/main" id="{76206442-5802-4ECC-89FF-725CB9831F7E}"/>
               </a:ext>
             </a:extLst>
           </p:cNvPr>
@@ -11852,7 +11738,7 @@
           <p:cNvPr id="204" name="Соединительная линия уступом 59">
             <a:extLst>
               <a:ext uri="{FF2B5EF4-FFF2-40B4-BE49-F238E27FC236}">
-                <a16:creationId xmlns="" xmlns:a16="http://schemas.microsoft.com/office/drawing/2014/main" id="{41E480A3-A812-4731-BA0E-CEBFE1B527FF}"/>
+                <a16:creationId xmlns:a16="http://schemas.microsoft.com/office/drawing/2014/main" id="{41E480A3-A812-4731-BA0E-CEBFE1B527FF}"/>
               </a:ext>
             </a:extLst>
           </p:cNvPr>
@@ -11897,7 +11783,7 @@
           <p:cNvPr id="206" name="Соединительная линия уступом 59">
             <a:extLst>
               <a:ext uri="{FF2B5EF4-FFF2-40B4-BE49-F238E27FC236}">
-                <a16:creationId xmlns="" xmlns:a16="http://schemas.microsoft.com/office/drawing/2014/main" id="{41E480A3-A812-4731-BA0E-CEBFE1B527FF}"/>
+                <a16:creationId xmlns:a16="http://schemas.microsoft.com/office/drawing/2014/main" id="{41E480A3-A812-4731-BA0E-CEBFE1B527FF}"/>
               </a:ext>
             </a:extLst>
           </p:cNvPr>
@@ -11942,7 +11828,7 @@
           <p:cNvPr id="210" name="Прямоугольник 209">
             <a:extLst>
               <a:ext uri="{FF2B5EF4-FFF2-40B4-BE49-F238E27FC236}">
-                <a16:creationId xmlns="" xmlns:a16="http://schemas.microsoft.com/office/drawing/2014/main" id="{3F73D485-85C1-4021-BF3A-F98C9D79AF9E}"/>
+                <a16:creationId xmlns:a16="http://schemas.microsoft.com/office/drawing/2014/main" id="{3F73D485-85C1-4021-BF3A-F98C9D79AF9E}"/>
               </a:ext>
             </a:extLst>
           </p:cNvPr>
@@ -11993,7 +11879,7 @@
           <a:p>
             <a:pPr algn="ctr"/>
             <a:r>
-              <a:rPr lang="ru-RU" sz="700" dirty="0" smtClean="0"/>
+              <a:rPr lang="ru-RU" sz="700" dirty="0"/>
               <a:t>Борьба с влиянием Коминтерна</a:t>
             </a:r>
             <a:endParaRPr lang="ru-RU" sz="500" dirty="0"/>
@@ -12005,7 +11891,7 @@
           <p:cNvPr id="211" name="Соединительная линия уступом 59">
             <a:extLst>
               <a:ext uri="{FF2B5EF4-FFF2-40B4-BE49-F238E27FC236}">
-                <a16:creationId xmlns="" xmlns:a16="http://schemas.microsoft.com/office/drawing/2014/main" id="{41E480A3-A812-4731-BA0E-CEBFE1B527FF}"/>
+                <a16:creationId xmlns:a16="http://schemas.microsoft.com/office/drawing/2014/main" id="{41E480A3-A812-4731-BA0E-CEBFE1B527FF}"/>
               </a:ext>
             </a:extLst>
           </p:cNvPr>
@@ -12050,7 +11936,7 @@
           <p:cNvPr id="212" name="Соединительная линия уступом 59">
             <a:extLst>
               <a:ext uri="{FF2B5EF4-FFF2-40B4-BE49-F238E27FC236}">
-                <a16:creationId xmlns="" xmlns:a16="http://schemas.microsoft.com/office/drawing/2014/main" id="{41E480A3-A812-4731-BA0E-CEBFE1B527FF}"/>
+                <a16:creationId xmlns:a16="http://schemas.microsoft.com/office/drawing/2014/main" id="{41E480A3-A812-4731-BA0E-CEBFE1B527FF}"/>
               </a:ext>
             </a:extLst>
           </p:cNvPr>
@@ -12095,7 +11981,7 @@
           <p:cNvPr id="213" name="Соединительная линия уступом 123">
             <a:extLst>
               <a:ext uri="{FF2B5EF4-FFF2-40B4-BE49-F238E27FC236}">
-                <a16:creationId xmlns="" xmlns:a16="http://schemas.microsoft.com/office/drawing/2014/main" id="{0DD383AF-7358-4D05-9F30-B6B41AF854DB}"/>
+                <a16:creationId xmlns:a16="http://schemas.microsoft.com/office/drawing/2014/main" id="{0DD383AF-7358-4D05-9F30-B6B41AF854DB}"/>
               </a:ext>
             </a:extLst>
           </p:cNvPr>
@@ -12140,7 +12026,7 @@
           <p:cNvPr id="214" name="Соединительная линия уступом 123">
             <a:extLst>
               <a:ext uri="{FF2B5EF4-FFF2-40B4-BE49-F238E27FC236}">
-                <a16:creationId xmlns="" xmlns:a16="http://schemas.microsoft.com/office/drawing/2014/main" id="{0DD383AF-7358-4D05-9F30-B6B41AF854DB}"/>
+                <a16:creationId xmlns:a16="http://schemas.microsoft.com/office/drawing/2014/main" id="{0DD383AF-7358-4D05-9F30-B6B41AF854DB}"/>
               </a:ext>
             </a:extLst>
           </p:cNvPr>
@@ -12185,7 +12071,7 @@
           <p:cNvPr id="216" name="Соединительная линия уступом 123">
             <a:extLst>
               <a:ext uri="{FF2B5EF4-FFF2-40B4-BE49-F238E27FC236}">
-                <a16:creationId xmlns="" xmlns:a16="http://schemas.microsoft.com/office/drawing/2014/main" id="{0DD383AF-7358-4D05-9F30-B6B41AF854DB}"/>
+                <a16:creationId xmlns:a16="http://schemas.microsoft.com/office/drawing/2014/main" id="{0DD383AF-7358-4D05-9F30-B6B41AF854DB}"/>
               </a:ext>
             </a:extLst>
           </p:cNvPr>
@@ -12490,7 +12376,7 @@
           <p:cNvPr id="219" name="Соединительная линия уступом 123">
             <a:extLst>
               <a:ext uri="{FF2B5EF4-FFF2-40B4-BE49-F238E27FC236}">
-                <a16:creationId xmlns="" xmlns:a16="http://schemas.microsoft.com/office/drawing/2014/main" id="{95E12289-D5C4-4A71-B46E-2AB617265BCE}"/>
+                <a16:creationId xmlns:a16="http://schemas.microsoft.com/office/drawing/2014/main" id="{95E12289-D5C4-4A71-B46E-2AB617265BCE}"/>
               </a:ext>
             </a:extLst>
           </p:cNvPr>
@@ -12648,7 +12534,7 @@
           <a:p>
             <a:pPr algn="ctr"/>
             <a:r>
-              <a:rPr lang="ru-RU" sz="700" dirty="0" smtClean="0"/>
+              <a:rPr lang="ru-RU" sz="700" dirty="0"/>
               <a:t>Новые университеты</a:t>
             </a:r>
             <a:endParaRPr lang="ru-RU" sz="500" dirty="0"/>
@@ -12736,7 +12622,7 @@
           <p:cNvPr id="228" name="Прямоугольник 227">
             <a:extLst>
               <a:ext uri="{FF2B5EF4-FFF2-40B4-BE49-F238E27FC236}">
-                <a16:creationId xmlns="" xmlns:a16="http://schemas.microsoft.com/office/drawing/2014/main" id="{F8D1DA47-C504-41CD-B91F-0C23B929D953}"/>
+                <a16:creationId xmlns:a16="http://schemas.microsoft.com/office/drawing/2014/main" id="{F8D1DA47-C504-41CD-B91F-0C23B929D953}"/>
               </a:ext>
             </a:extLst>
           </p:cNvPr>
@@ -12776,12 +12662,8 @@
           <a:p>
             <a:pPr algn="ctr"/>
             <a:r>
-              <a:rPr lang="ru-RU" sz="700" dirty="0" smtClean="0"/>
-              <a:t>Отвернуться от </a:t>
-            </a:r>
-            <a:r>
               <a:rPr lang="ru-RU" sz="700" dirty="0"/>
-              <a:t>мелкой буржуазии </a:t>
+              <a:t>Отвернуться от мелкой буржуазии </a:t>
             </a:r>
             <a:r>
               <a:rPr lang="ru-RU" sz="100" dirty="0"/>
@@ -12865,13 +12747,8 @@
             </a:r>
             <a:r>
               <a:rPr lang="ru-RU" sz="100" dirty="0"/>
-              <a:t> и </a:t>
-            </a:r>
-            <a:r>
-              <a:rPr lang="ru-RU" sz="100" dirty="0" smtClean="0"/>
-              <a:t>другими)</a:t>
-            </a:r>
-            <a:endParaRPr lang="ru-RU" sz="100" dirty="0"/>
+              <a:t> и другими)</a:t>
+            </a:r>
           </a:p>
         </p:txBody>
       </p:sp>
@@ -12880,7 +12757,7 @@
           <p:cNvPr id="229" name="Прямоугольник 228">
             <a:extLst>
               <a:ext uri="{FF2B5EF4-FFF2-40B4-BE49-F238E27FC236}">
-                <a16:creationId xmlns="" xmlns:a16="http://schemas.microsoft.com/office/drawing/2014/main" id="{7DAEAC1F-B20B-46CD-B818-99851DE5EF87}"/>
+                <a16:creationId xmlns:a16="http://schemas.microsoft.com/office/drawing/2014/main" id="{7DAEAC1F-B20B-46CD-B818-99851DE5EF87}"/>
               </a:ext>
             </a:extLst>
           </p:cNvPr>
@@ -12920,10 +12797,9 @@
           <a:p>
             <a:pPr algn="ctr"/>
             <a:r>
-              <a:rPr lang="ru-RU" sz="700" dirty="0" smtClean="0"/>
+              <a:rPr lang="ru-RU" sz="700" dirty="0"/>
               <a:t>Репрессировать троцкистов (наше)</a:t>
             </a:r>
-            <a:endParaRPr lang="ru-RU" sz="700" dirty="0"/>
           </a:p>
         </p:txBody>
       </p:sp>
@@ -12932,7 +12808,7 @@
           <p:cNvPr id="232" name="Прямоугольник 231">
             <a:extLst>
               <a:ext uri="{FF2B5EF4-FFF2-40B4-BE49-F238E27FC236}">
-                <a16:creationId xmlns="" xmlns:a16="http://schemas.microsoft.com/office/drawing/2014/main" id="{7DAEAC1F-B20B-46CD-B818-99851DE5EF87}"/>
+                <a16:creationId xmlns:a16="http://schemas.microsoft.com/office/drawing/2014/main" id="{7DAEAC1F-B20B-46CD-B818-99851DE5EF87}"/>
               </a:ext>
             </a:extLst>
           </p:cNvPr>
@@ -12972,12 +12848,8 @@
           <a:p>
             <a:pPr algn="ctr"/>
             <a:r>
-              <a:rPr lang="ru-RU" sz="700" dirty="0" smtClean="0"/>
-              <a:t>Введение обязательной </a:t>
-            </a:r>
-            <a:r>
               <a:rPr lang="ru-RU" sz="700" dirty="0"/>
-              <a:t>воинской повинности </a:t>
+              <a:t>Введение обязательной воинской повинности </a:t>
             </a:r>
             <a:r>
               <a:rPr lang="ru-RU" sz="200" dirty="0"/>
@@ -13000,7 +12872,7 @@
           <p:cNvPr id="233" name="Прямоугольник 232">
             <a:extLst>
               <a:ext uri="{FF2B5EF4-FFF2-40B4-BE49-F238E27FC236}">
-                <a16:creationId xmlns="" xmlns:a16="http://schemas.microsoft.com/office/drawing/2014/main" id="{7DAEAC1F-B20B-46CD-B818-99851DE5EF87}"/>
+                <a16:creationId xmlns:a16="http://schemas.microsoft.com/office/drawing/2014/main" id="{7DAEAC1F-B20B-46CD-B818-99851DE5EF87}"/>
               </a:ext>
             </a:extLst>
           </p:cNvPr>
@@ -13040,18 +12912,13 @@
           <a:p>
             <a:pPr algn="ctr"/>
             <a:r>
-              <a:rPr lang="ru-RU" sz="700" dirty="0" smtClean="0"/>
-              <a:t>Координация сельскохозяйственных и промышленных </a:t>
-            </a:r>
-            <a:r>
               <a:rPr lang="ru-RU" sz="700" dirty="0"/>
-              <a:t>производств </a:t>
+              <a:t>Координация сельскохозяйственных и промышленных производств </a:t>
             </a:r>
             <a:r>
               <a:rPr lang="ru-RU" sz="100" dirty="0"/>
               <a:t>(координация сельскохозяйственного и промышленного производства, с тем чтобы и то и другое содействовало быстрейшему достижению главной цели народной борьбы в этот исторический момент — выиграть войну.)</a:t>
             </a:r>
-            <a:endParaRPr lang="ru-RU" sz="100" dirty="0"/>
           </a:p>
         </p:txBody>
       </p:sp>
@@ -13060,7 +12927,7 @@
           <p:cNvPr id="235" name="Прямоугольник 234">
             <a:extLst>
               <a:ext uri="{FF2B5EF4-FFF2-40B4-BE49-F238E27FC236}">
-                <a16:creationId xmlns="" xmlns:a16="http://schemas.microsoft.com/office/drawing/2014/main" id="{3F73D485-85C1-4021-BF3A-F98C9D79AF9E}"/>
+                <a16:creationId xmlns:a16="http://schemas.microsoft.com/office/drawing/2014/main" id="{3F73D485-85C1-4021-BF3A-F98C9D79AF9E}"/>
               </a:ext>
             </a:extLst>
           </p:cNvPr>
@@ -13111,7 +12978,7 @@
           <a:p>
             <a:pPr algn="ctr"/>
             <a:r>
-              <a:rPr lang="ru-RU" sz="700" dirty="0" smtClean="0"/>
+              <a:rPr lang="ru-RU" sz="700" dirty="0"/>
               <a:t>Создание мощной военной промышленности</a:t>
             </a:r>
             <a:endParaRPr lang="ru-RU" sz="500" dirty="0"/>
@@ -13123,7 +12990,7 @@
           <p:cNvPr id="236" name="Соединительная линия уступом 59">
             <a:extLst>
               <a:ext uri="{FF2B5EF4-FFF2-40B4-BE49-F238E27FC236}">
-                <a16:creationId xmlns="" xmlns:a16="http://schemas.microsoft.com/office/drawing/2014/main" id="{146CBA15-0EC9-4B49-9151-897C0373358B}"/>
+                <a16:creationId xmlns:a16="http://schemas.microsoft.com/office/drawing/2014/main" id="{146CBA15-0EC9-4B49-9151-897C0373358B}"/>
               </a:ext>
             </a:extLst>
           </p:cNvPr>
@@ -13205,24 +13072,12 @@
           <a:p>
             <a:pPr algn="ctr"/>
             <a:r>
-              <a:rPr lang="ru-RU" sz="700" dirty="0" smtClean="0"/>
-              <a:t>Политика улучшения </a:t>
-            </a:r>
-            <a:r>
               <a:rPr lang="ru-RU" sz="700" dirty="0"/>
-              <a:t>материального положения </a:t>
+              <a:t>Политика улучшения материального положения </a:t>
             </a:r>
             <a:r>
               <a:rPr lang="ru-RU" sz="200" dirty="0"/>
-              <a:t>(Проведение политики систематического и </a:t>
-            </a:r>
-            <a:r>
-              <a:rPr lang="ru-RU" sz="200" dirty="0" smtClean="0"/>
-              <a:t>серь­езного </a:t>
-            </a:r>
-            <a:r>
-              <a:rPr lang="ru-RU" sz="200" dirty="0"/>
-              <a:t>улучшения материального положения, условий труда, быта и культурного обслуживания городского и сельского пролетариата.)</a:t>
+              <a:t>(Проведение политики систематического и серь­езного улучшения материального положения, условий труда, быта и культурного обслуживания городского и сельского пролетариата.)</a:t>
             </a:r>
             <a:endParaRPr lang="ru-RU" sz="100" dirty="0"/>
           </a:p>
@@ -13233,7 +13088,7 @@
           <p:cNvPr id="238" name="Прямоугольник 237">
             <a:extLst>
               <a:ext uri="{FF2B5EF4-FFF2-40B4-BE49-F238E27FC236}">
-                <a16:creationId xmlns="" xmlns:a16="http://schemas.microsoft.com/office/drawing/2014/main" id="{7DAEAC1F-B20B-46CD-B818-99851DE5EF87}"/>
+                <a16:creationId xmlns:a16="http://schemas.microsoft.com/office/drawing/2014/main" id="{7DAEAC1F-B20B-46CD-B818-99851DE5EF87}"/>
               </a:ext>
             </a:extLst>
           </p:cNvPr>
@@ -13273,10 +13128,9 @@
           <a:p>
             <a:pPr algn="ctr"/>
             <a:r>
-              <a:rPr lang="ru-RU" sz="700" dirty="0" smtClean="0"/>
+              <a:rPr lang="ru-RU" sz="700" dirty="0"/>
               <a:t>Защита советского союза</a:t>
             </a:r>
-            <a:endParaRPr lang="ru-RU" sz="700" dirty="0"/>
           </a:p>
         </p:txBody>
       </p:sp>
@@ -13285,7 +13139,7 @@
           <p:cNvPr id="239" name="Прямая соединительная линия 238">
             <a:extLst>
               <a:ext uri="{FF2B5EF4-FFF2-40B4-BE49-F238E27FC236}">
-                <a16:creationId xmlns="" xmlns:a16="http://schemas.microsoft.com/office/drawing/2014/main" id="{BF4D2C3F-BCB4-485D-98D8-A6C1B37BA272}"/>
+                <a16:creationId xmlns:a16="http://schemas.microsoft.com/office/drawing/2014/main" id="{BF4D2C3F-BCB4-485D-98D8-A6C1B37BA272}"/>
               </a:ext>
             </a:extLst>
           </p:cNvPr>
@@ -13330,7 +13184,7 @@
           <p:cNvPr id="240" name="Соединительная линия уступом 59">
             <a:extLst>
               <a:ext uri="{FF2B5EF4-FFF2-40B4-BE49-F238E27FC236}">
-                <a16:creationId xmlns="" xmlns:a16="http://schemas.microsoft.com/office/drawing/2014/main" id="{41E480A3-A812-4731-BA0E-CEBFE1B527FF}"/>
+                <a16:creationId xmlns:a16="http://schemas.microsoft.com/office/drawing/2014/main" id="{41E480A3-A812-4731-BA0E-CEBFE1B527FF}"/>
               </a:ext>
             </a:extLst>
           </p:cNvPr>
@@ -13375,7 +13229,7 @@
           <p:cNvPr id="241" name="Прямоугольник 240">
             <a:extLst>
               <a:ext uri="{FF2B5EF4-FFF2-40B4-BE49-F238E27FC236}">
-                <a16:creationId xmlns="" xmlns:a16="http://schemas.microsoft.com/office/drawing/2014/main" id="{7DAEAC1F-B20B-46CD-B818-99851DE5EF87}"/>
+                <a16:creationId xmlns:a16="http://schemas.microsoft.com/office/drawing/2014/main" id="{7DAEAC1F-B20B-46CD-B818-99851DE5EF87}"/>
               </a:ext>
             </a:extLst>
           </p:cNvPr>
@@ -13419,28 +13273,118 @@
             <a:pPr algn="ctr"/>
             <a:r>
               <a:rPr lang="ru-RU" sz="600" dirty="0"/>
-              <a:t>проведение миролюбивой внешней политики, </a:t>
-            </a:r>
-            <a:r>
-              <a:rPr lang="ru-RU" sz="600" dirty="0" smtClean="0"/>
-              <a:t>под­держка </a:t>
-            </a:r>
-            <a:r>
-              <a:rPr lang="ru-RU" sz="600" dirty="0"/>
-              <a:t>Лиги наций и принципа коллективной </a:t>
-            </a:r>
-            <a:r>
-              <a:rPr lang="ru-RU" sz="600" dirty="0" smtClean="0"/>
-              <a:t>безопас­ности</a:t>
-            </a:r>
-            <a:r>
-              <a:rPr lang="ru-RU" sz="600" dirty="0"/>
-              <a:t>. </a:t>
+              <a:t>проведение миролюбивой внешней политики, под­держка Лиги наций и принципа коллективной безопас­ности. </a:t>
             </a:r>
             <a:endParaRPr lang="ru-RU" sz="500" dirty="0"/>
           </a:p>
         </p:txBody>
       </p:sp>
+      <p:sp>
+        <p:nvSpPr>
+          <p:cNvPr id="234" name="Прямоугольник 233">
+            <a:extLst>
+              <a:ext uri="{FF2B5EF4-FFF2-40B4-BE49-F238E27FC236}">
+                <a16:creationId xmlns:a16="http://schemas.microsoft.com/office/drawing/2014/main" id="{2061239C-FA52-42FA-B47C-EF4539C7AB40}"/>
+              </a:ext>
+            </a:extLst>
+          </p:cNvPr>
+          <p:cNvSpPr/>
+          <p:nvPr/>
+        </p:nvSpPr>
+        <p:spPr>
+          <a:xfrm>
+            <a:off x="50280075" y="3819213"/>
+            <a:ext cx="926325" cy="540000"/>
+          </a:xfrm>
+          <a:prstGeom prst="rect">
+            <a:avLst/>
+          </a:prstGeom>
+          <a:solidFill>
+            <a:schemeClr val="bg1">
+              <a:lumMod val="50000"/>
+            </a:schemeClr>
+          </a:solidFill>
+          <a:ln w="19050"/>
+        </p:spPr>
+        <p:style>
+          <a:lnRef idx="2">
+            <a:schemeClr val="accent1"/>
+          </a:lnRef>
+          <a:fillRef idx="1">
+            <a:schemeClr val="lt1"/>
+          </a:fillRef>
+          <a:effectRef idx="0">
+            <a:schemeClr val="accent1"/>
+          </a:effectRef>
+          <a:fontRef idx="minor">
+            <a:schemeClr val="dk1"/>
+          </a:fontRef>
+        </p:style>
+        <p:txBody>
+          <a:bodyPr lIns="124733" tIns="62367" rIns="124733" bIns="62367" rtlCol="0" anchor="ctr"/>
+          <a:lstStyle/>
+          <a:p>
+            <a:pPr algn="ctr"/>
+            <a:r>
+              <a:rPr lang="ru-RU" sz="700" dirty="0"/>
+              <a:t>Крушение надежд (</a:t>
+            </a:r>
+            <a:r>
+              <a:rPr lang="ru-RU" sz="700" dirty="0" err="1"/>
+              <a:t>Санхуро</a:t>
+            </a:r>
+            <a:r>
+              <a:rPr lang="ru-RU" sz="700" dirty="0"/>
+              <a:t> наебнулся)</a:t>
+            </a:r>
+          </a:p>
+        </p:txBody>
+      </p:sp>
+      <p:cxnSp>
+        <p:nvCxnSpPr>
+          <p:cNvPr id="242" name="Прямая соединительная линия 241">
+            <a:extLst>
+              <a:ext uri="{FF2B5EF4-FFF2-40B4-BE49-F238E27FC236}">
+                <a16:creationId xmlns:a16="http://schemas.microsoft.com/office/drawing/2014/main" id="{779399EB-4FE7-4A5B-8D56-3E136B134C7D}"/>
+              </a:ext>
+            </a:extLst>
+          </p:cNvPr>
+          <p:cNvCxnSpPr>
+            <a:cxnSpLocks/>
+            <a:stCxn id="801" idx="3"/>
+            <a:endCxn id="234" idx="1"/>
+          </p:cNvCxnSpPr>
+          <p:nvPr/>
+        </p:nvCxnSpPr>
+        <p:spPr>
+          <a:xfrm flipV="1">
+            <a:off x="32090738" y="4089213"/>
+            <a:ext cx="18189337" cy="1"/>
+          </a:xfrm>
+          <a:prstGeom prst="line">
+            <a:avLst/>
+          </a:prstGeom>
+          <a:ln w="19050">
+            <a:solidFill>
+              <a:srgbClr val="FF0000"/>
+            </a:solidFill>
+          </a:ln>
+        </p:spPr>
+        <p:style>
+          <a:lnRef idx="1">
+            <a:schemeClr val="accent1"/>
+          </a:lnRef>
+          <a:fillRef idx="0">
+            <a:schemeClr val="accent1"/>
+          </a:fillRef>
+          <a:effectRef idx="0">
+            <a:schemeClr val="accent1"/>
+          </a:effectRef>
+          <a:fontRef idx="minor">
+            <a:schemeClr val="tx1"/>
+          </a:fontRef>
+        </p:style>
+      </p:cxnSp>
     </p:spTree>
     <p:extLst>
       <p:ext uri="{BB962C8B-B14F-4D97-AF65-F5344CB8AC3E}">
@@ -13709,7 +13653,7 @@
   <a:extraClrSchemeLst/>
   <a:extLst>
     <a:ext uri="{05A4C25C-085E-4340-85A3-A5531E510DB2}">
-      <thm15:themeFamily xmlns="" xmlns:thm15="http://schemas.microsoft.com/office/thememl/2012/main" name="Office Theme" id="{62F939B6-93AF-4DB8-9C6B-D6C7DFDC589F}" vid="{4A3C46E8-61CC-4603-A589-7422A47A8E4A}"/>
+      <thm15:themeFamily xmlns:thm15="http://schemas.microsoft.com/office/thememl/2012/main" name="Office Theme" id="{62F939B6-93AF-4DB8-9C6B-D6C7DFDC589F}" vid="{4A3C46E8-61CC-4603-A589-7422A47A8E4A}"/>
     </a:ext>
   </a:extLst>
 </a:theme>
@@ -13970,7 +13914,7 @@
   <a:extraClrSchemeLst/>
   <a:extLst>
     <a:ext uri="{05A4C25C-085E-4340-85A3-A5531E510DB2}">
-      <thm15:themeFamily xmlns="" xmlns:thm15="http://schemas.microsoft.com/office/thememl/2012/main" name="Office Theme" id="{62F939B6-93AF-4DB8-9C6B-D6C7DFDC589F}" vid="{4A3C46E8-61CC-4603-A589-7422A47A8E4A}"/>
+      <thm15:themeFamily xmlns:thm15="http://schemas.microsoft.com/office/thememl/2012/main" name="Office Theme" id="{62F939B6-93AF-4DB8-9C6B-D6C7DFDC589F}" vid="{4A3C46E8-61CC-4603-A589-7422A47A8E4A}"/>
     </a:ext>
   </a:extLst>
 </a:theme>
